--- a/Video_Presentation_Slides-Team1.pptx
+++ b/Video_Presentation_Slides-Team1.pptx
@@ -4314,7 +4314,7 @@
               </a:defRPr>
             </a:pPr>
             <a:r>
-              <a:t>AI assistance is disclosed in report and should be reviewed before submission.</a:t>
+              <a:t>AI assistance is disclosed in the report and repository.</a:t>
             </a:r>
           </a:p>
         </p:txBody>

--- a/Video_Presentation_Slides-Team1.pptx
+++ b/Video_Presentation_Slides-Team1.pptx
@@ -3166,7 +3166,7 @@
               </a:defRPr>
             </a:pPr>
             <a:r>
-              <a:t>Predicting High Quality Wine From Physicochemical Measurements</a:t>
+              <a:t>Predicting Online Purchase Conversion From Session Behavior</a:t>
             </a:r>
           </a:p>
         </p:txBody>
@@ -3201,7 +3201,7 @@
               </a:defRPr>
             </a:pPr>
             <a:r>
-              <a:t>Predict whether red wine will receive a high sensory quality score.</a:t>
+              <a:t>Predict whether an online shopping session will generate revenue.</a:t>
             </a:r>
           </a:p>
           <a:p>
@@ -3213,7 +3213,7 @@
               </a:defRPr>
             </a:pPr>
             <a:r>
-              <a:t>Frame quality score 7 or higher as High.</a:t>
+              <a:t>Frame Revenue as Purchase versus NoPurchase.</a:t>
             </a:r>
           </a:p>
           <a:p>
@@ -3225,7 +3225,7 @@
               </a:defRPr>
             </a:pPr>
             <a:r>
-              <a:t>Use chemistry measurements to support early screening decisions.</a:t>
+              <a:t>Use session behavior to support targeted marketing decisions.</a:t>
             </a:r>
           </a:p>
           <a:p>
@@ -3237,14 +3237,14 @@
               </a:defRPr>
             </a:pPr>
             <a:r>
-              <a:t>Model is decision support, not replacement for expert tasting.</a:t>
+              <a:t>Model is decision support, not automatic customer treatment.</a:t>
             </a:r>
           </a:p>
         </p:txBody>
       </p:sp>
       <p:pic>
         <p:nvPicPr>
-          <p:cNvPr id="5" name="Picture 4" descr="quality_distribution.png"/>
+          <p:cNvPr id="5" name="Picture 4" descr="purchase_distribution.png"/>
           <p:cNvPicPr>
             <a:picLocks noChangeAspect="1"/>
           </p:cNvPicPr>
@@ -3349,7 +3349,7 @@
               </a:defRPr>
             </a:pPr>
             <a:r>
-              <a:t>Predicting High Quality Wine From Physicochemical Measurements</a:t>
+              <a:t>Predicting Online Purchase Conversion From Session Behavior</a:t>
             </a:r>
           </a:p>
         </p:txBody>
@@ -3396,7 +3396,7 @@
               </a:defRPr>
             </a:pPr>
             <a:r>
-              <a:t>Sensitivity measures how many high quality wines are found.</a:t>
+              <a:t>Sensitivity measures how many purchase sessions are found.</a:t>
             </a:r>
           </a:p>
           <a:p>
@@ -3408,7 +3408,7 @@
               </a:defRPr>
             </a:pPr>
             <a:r>
-              <a:t>Precision measures how many predicted high wines are truly high.</a:t>
+              <a:t>Precision measures how many predicted purchases are true purchases.</a:t>
             </a:r>
           </a:p>
           <a:p>
@@ -3532,7 +3532,7 @@
               </a:defRPr>
             </a:pPr>
             <a:r>
-              <a:t>Predicting High Quality Wine From Physicochemical Measurements</a:t>
+              <a:t>Predicting Online Purchase Conversion From Session Behavior</a:t>
             </a:r>
           </a:p>
         </p:txBody>
@@ -3579,7 +3579,7 @@
               </a:defRPr>
             </a:pPr>
             <a:r>
-              <a:t>ROC AUC: 0.927.</a:t>
+              <a:t>ROC AUC: 0.935.</a:t>
             </a:r>
           </a:p>
           <a:p>
@@ -3591,7 +3591,7 @@
               </a:defRPr>
             </a:pPr>
             <a:r>
-              <a:t>F1 score: 0.673.</a:t>
+              <a:t>F1 score: 0.716.</a:t>
             </a:r>
           </a:p>
           <a:p>
@@ -3603,7 +3603,7 @@
               </a:defRPr>
             </a:pPr>
             <a:r>
-              <a:t>Accuracy: 0.894.</a:t>
+              <a:t>Accuracy: 0.909.</a:t>
             </a:r>
           </a:p>
           <a:p>
@@ -3615,7 +3615,7 @@
               </a:defRPr>
             </a:pPr>
             <a:r>
-              <a:t>Sensitivity: 0.795; specificity: 0.910.</a:t>
+              <a:t>Sensitivity: 0.738; specificity: 0.941.</a:t>
             </a:r>
           </a:p>
         </p:txBody>
@@ -3673,7 +3673,7 @@
             </a:r>
             <a:br/>
             <a:r>
-              <a:t>0.927</a:t>
+              <a:t>0.935</a:t>
             </a:r>
           </a:p>
         </p:txBody>
@@ -3731,7 +3731,7 @@
             </a:r>
             <a:br/>
             <a:r>
-              <a:t>0.673</a:t>
+              <a:t>0.716</a:t>
             </a:r>
           </a:p>
         </p:txBody>
@@ -3789,7 +3789,7 @@
             </a:r>
             <a:br/>
             <a:r>
-              <a:t>0.894</a:t>
+              <a:t>0.909</a:t>
             </a:r>
           </a:p>
         </p:txBody>
@@ -3901,7 +3901,7 @@
               </a:defRPr>
             </a:pPr>
             <a:r>
-              <a:t>Predicting High Quality Wine From Physicochemical Measurements</a:t>
+              <a:t>Predicting Online Purchase Conversion From Session Behavior</a:t>
             </a:r>
           </a:p>
         </p:txBody>
@@ -3948,7 +3948,7 @@
               </a:defRPr>
             </a:pPr>
             <a:r>
-              <a:t>alcohol, volatile acidity, sulphates, density, citric acid.</a:t>
+              <a:t>PageValues, ExitRates, ProductRelated_Duration, Month, ProductRelated.</a:t>
             </a:r>
           </a:p>
           <a:p>
@@ -3960,7 +3960,7 @@
               </a:defRPr>
             </a:pPr>
             <a:r>
-              <a:t>These variables help rank wines by probability of high quality.</a:t>
+              <a:t>These variables help rank sessions by purchase probability.</a:t>
             </a:r>
           </a:p>
           <a:p>
@@ -4084,7 +4084,7 @@
               </a:defRPr>
             </a:pPr>
             <a:r>
-              <a:t>Predicting High Quality Wine From Physicochemical Measurements</a:t>
+              <a:t>Predicting Online Purchase Conversion From Session Behavior</a:t>
             </a:r>
           </a:p>
         </p:txBody>
@@ -4119,7 +4119,7 @@
               </a:defRPr>
             </a:pPr>
             <a:r>
-              <a:t>Dataset covers one wine type and region.</a:t>
+              <a:t>Dataset comes from one e-commerce context.</a:t>
             </a:r>
           </a:p>
           <a:p>
@@ -4131,7 +4131,7 @@
               </a:defRPr>
             </a:pPr>
             <a:r>
-              <a:t>Missing business variables: brand, price, vintage, producer, market.</a:t>
+              <a:t>Missing business variables: product, price, customer history, margin, and campaign cost.</a:t>
             </a:r>
           </a:p>
           <a:p>
@@ -4143,7 +4143,7 @@
               </a:defRPr>
             </a:pPr>
             <a:r>
-              <a:t>Need external validation before operational use.</a:t>
+              <a:t>Verify PageValues availability before real-time deployment.</a:t>
             </a:r>
           </a:p>
           <a:p>
@@ -4155,7 +4155,7 @@
               </a:defRPr>
             </a:pPr>
             <a:r>
-              <a:t>Next step: calibrate probabilities and test on newer data.</a:t>
+              <a:t>Next step: calibrate probabilities and A/B test interventions.</a:t>
             </a:r>
           </a:p>
         </p:txBody>
@@ -4243,7 +4243,7 @@
               </a:defRPr>
             </a:pPr>
             <a:r>
-              <a:t>Predicting High Quality Wine From Physicochemical Measurements</a:t>
+              <a:t>Predicting Online Purchase Conversion From Session Behavior</a:t>
             </a:r>
           </a:p>
         </p:txBody>
@@ -4278,7 +4278,7 @@
               </a:defRPr>
             </a:pPr>
             <a:r>
-              <a:t>Chemistry data can identify useful signal for quality screening.</a:t>
+              <a:t>Session behavior can identify useful conversion-intent signal.</a:t>
             </a:r>
           </a:p>
           <a:p>
@@ -4290,7 +4290,7 @@
               </a:defRPr>
             </a:pPr>
             <a:r>
-              <a:t>Use output as ranked shortlist, not final judgment.</a:t>
+              <a:t>Use output as ranked shortlist, not final customer-treatment rule.</a:t>
             </a:r>
           </a:p>
           <a:p>
@@ -4302,7 +4302,7 @@
               </a:defRPr>
             </a:pPr>
             <a:r>
-              <a:t>Best use is prioritizing additional review.</a:t>
+              <a:t>Best use is prioritizing controlled marketing experiments.</a:t>
             </a:r>
           </a:p>
           <a:p>
@@ -4402,7 +4402,7 @@
               </a:defRPr>
             </a:pPr>
             <a:r>
-              <a:t>Predicting High Quality Wine From Physicochemical Measurements</a:t>
+              <a:t>Predicting Online Purchase Conversion From Session Behavior</a:t>
             </a:r>
           </a:p>
         </p:txBody>
@@ -4437,7 +4437,7 @@
               </a:defRPr>
             </a:pPr>
             <a:r>
-              <a:t>Tasting panels are valuable but limited.</a:t>
+              <a:t>Most shopping sessions do not purchase.</a:t>
             </a:r>
           </a:p>
           <a:p>
@@ -4449,7 +4449,7 @@
               </a:defRPr>
             </a:pPr>
             <a:r>
-              <a:t>Lab measurements are faster and cheaper to collect.</a:t>
+              <a:t>Marketing and support interventions have limited capacity.</a:t>
             </a:r>
           </a:p>
           <a:p>
@@ -4461,7 +4461,7 @@
               </a:defRPr>
             </a:pPr>
             <a:r>
-              <a:t>A model can rank wines before extra review.</a:t>
+              <a:t>A model can rank sessions by purchase intent.</a:t>
             </a:r>
           </a:p>
           <a:p>
@@ -4473,11 +4473,35 @@
               </a:defRPr>
             </a:pPr>
             <a:r>
-              <a:t>Goal is prioritization, not automatic approval.</a:t>
-            </a:r>
-          </a:p>
-        </p:txBody>
-      </p:sp>
+              <a:t>Goal is prioritization and experiment design.</a:t>
+            </a:r>
+          </a:p>
+        </p:txBody>
+      </p:sp>
+      <p:pic>
+        <p:nvPicPr>
+          <p:cNvPr id="5" name="Picture 4" descr="conversion_by_month.png"/>
+          <p:cNvPicPr>
+            <a:picLocks noChangeAspect="1"/>
+          </p:cNvPicPr>
+          <p:nvPr/>
+        </p:nvPicPr>
+        <p:blipFill>
+          <a:blip r:embed="rId2"/>
+          <a:stretch>
+            <a:fillRect/>
+          </a:stretch>
+        </p:blipFill>
+        <p:spPr>
+          <a:xfrm>
+            <a:off x="6446520" y="1417320"/>
+            <a:ext cx="5074920" cy="4206240"/>
+          </a:xfrm>
+          <a:prstGeom prst="rect">
+            <a:avLst/>
+          </a:prstGeom>
+        </p:spPr>
+      </p:pic>
     </p:spTree>
   </p:cSld>
   <p:clrMapOvr>
@@ -4561,7 +4585,7 @@
               </a:defRPr>
             </a:pPr>
             <a:r>
-              <a:t>Predicting High Quality Wine From Physicochemical Measurements</a:t>
+              <a:t>Predicting Online Purchase Conversion From Session Behavior</a:t>
             </a:r>
           </a:p>
         </p:txBody>
@@ -4596,7 +4620,7 @@
               </a:defRPr>
             </a:pPr>
             <a:r>
-              <a:t>UCI red wine quality dataset with 1,599 observations.</a:t>
+              <a:t>UCI online shoppers dataset with 12,330 sessions.</a:t>
             </a:r>
           </a:p>
           <a:p>
@@ -4608,7 +4632,7 @@
               </a:defRPr>
             </a:pPr>
             <a:r>
-              <a:t>Each row is one wine sample.</a:t>
+              <a:t>Each row is one website visit session.</a:t>
             </a:r>
           </a:p>
           <a:p>
@@ -4620,7 +4644,7 @@
               </a:defRPr>
             </a:pPr>
             <a:r>
-              <a:t>Predictors are acidity, sugar, chlorides, sulfur dioxide, density, pH, sulphates, and alcohol.</a:t>
+              <a:t>Predictors include page counts, durations, bounce and exit rates, month, visitor type, and traffic source.</a:t>
             </a:r>
           </a:p>
           <a:p>
@@ -4632,14 +4656,14 @@
               </a:defRPr>
             </a:pPr>
             <a:r>
-              <a:t>Original response is sensory quality rating.</a:t>
+              <a:t>Original response is whether the session generated revenue.</a:t>
             </a:r>
           </a:p>
         </p:txBody>
       </p:sp>
       <p:pic>
         <p:nvPicPr>
-          <p:cNvPr id="5" name="Picture 4" descr="predictor_boxplots.png"/>
+          <p:cNvPr id="5" name="Picture 4" descr="session_behavior_boxplots.png"/>
           <p:cNvPicPr>
             <a:picLocks noChangeAspect="1"/>
           </p:cNvPicPr>
@@ -4744,7 +4768,7 @@
               </a:defRPr>
             </a:pPr>
             <a:r>
-              <a:t>Predicting High Quality Wine From Physicochemical Measurements</a:t>
+              <a:t>Predicting Online Purchase Conversion From Session Behavior</a:t>
             </a:r>
           </a:p>
         </p:txBody>
@@ -4779,7 +4803,7 @@
               </a:defRPr>
             </a:pPr>
             <a:r>
-              <a:t>Binary target: High versus NotHigh.</a:t>
+              <a:t>Binary target: Purchase versus NoPurchase.</a:t>
             </a:r>
           </a:p>
           <a:p>
@@ -4791,7 +4815,7 @@
               </a:defRPr>
             </a:pPr>
             <a:r>
-              <a:t>High quality class is 13.6% of rows.</a:t>
+              <a:t>Purchase class is 15.5% of rows.</a:t>
             </a:r>
           </a:p>
           <a:p>
@@ -4822,7 +4846,7 @@
       </p:sp>
       <p:pic>
         <p:nvPicPr>
-          <p:cNvPr id="5" name="Picture 4" descr="quality_distribution.png"/>
+          <p:cNvPr id="5" name="Picture 4" descr="purchase_distribution.png"/>
           <p:cNvPicPr>
             <a:picLocks noChangeAspect="1"/>
           </p:cNvPicPr>
@@ -4927,7 +4951,7 @@
               </a:defRPr>
             </a:pPr>
             <a:r>
-              <a:t>Predicting High Quality Wine From Physicochemical Measurements</a:t>
+              <a:t>Predicting Online Purchase Conversion From Session Behavior</a:t>
             </a:r>
           </a:p>
         </p:txBody>
@@ -4962,7 +4986,7 @@
               </a:defRPr>
             </a:pPr>
             <a:r>
-              <a:t>High quality wines tend to show higher alcohol and sulphates.</a:t>
+              <a:t>Purchase sessions show higher page value and product engagement.</a:t>
             </a:r>
           </a:p>
           <a:p>
@@ -4974,7 +4998,7 @@
               </a:defRPr>
             </a:pPr>
             <a:r>
-              <a:t>They tend to show lower volatile acidity and lower density.</a:t>
+              <a:t>No-purchase sessions show higher bounce and exit rates.</a:t>
             </a:r>
           </a:p>
           <a:p>
@@ -5110,7 +5134,7 @@
               </a:defRPr>
             </a:pPr>
             <a:r>
-              <a:t>Predicting High Quality Wine From Physicochemical Measurements</a:t>
+              <a:t>Predicting Online Purchase Conversion From Session Behavior</a:t>
             </a:r>
           </a:p>
         </p:txBody>
@@ -5145,7 +5169,7 @@
               </a:defRPr>
             </a:pPr>
             <a:r>
-              <a:t>Converted original quality rating into a binary target.</a:t>
+              <a:t>Converted Revenue into a binary purchase target.</a:t>
             </a:r>
           </a:p>
           <a:p>
@@ -5157,7 +5181,7 @@
               </a:defRPr>
             </a:pPr>
             <a:r>
-              <a:t>Removed original quality score from model inputs to avoid leakage.</a:t>
+              <a:t>Removed original Revenue field from model inputs to avoid leakage.</a:t>
             </a:r>
           </a:p>
           <a:p>
@@ -5181,7 +5205,7 @@
               </a:defRPr>
             </a:pPr>
             <a:r>
-              <a:t>Standardized numeric predictors for logistic regression.</a:t>
+              <a:t>Collapsed rare technical categories and standardized numeric predictors for logistic regression.</a:t>
             </a:r>
           </a:p>
         </p:txBody>
@@ -5269,7 +5293,7 @@
               </a:defRPr>
             </a:pPr>
             <a:r>
-              <a:t>Predicting High Quality Wine From Physicochemical Measurements</a:t>
+              <a:t>Predicting Online Purchase Conversion From Session Behavior</a:t>
             </a:r>
           </a:p>
         </p:txBody>
@@ -5428,7 +5452,7 @@
               </a:defRPr>
             </a:pPr>
             <a:r>
-              <a:t>Predicting High Quality Wine From Physicochemical Measurements</a:t>
+              <a:t>Predicting Online Purchase Conversion From Session Behavior</a:t>
             </a:r>
           </a:p>
         </p:txBody>
@@ -5463,7 +5487,7 @@
               </a:defRPr>
             </a:pPr>
             <a:r>
-              <a:t>Used stratified 5-fold cross-validation.</a:t>
+              <a:t>Used stratified cross-validation.</a:t>
             </a:r>
           </a:p>
           <a:p>
@@ -5587,7 +5611,7 @@
               </a:defRPr>
             </a:pPr>
             <a:r>
-              <a:t>Predicting High Quality Wine From Physicochemical Measurements</a:t>
+              <a:t>Predicting Online Purchase Conversion From Session Behavior</a:t>
             </a:r>
           </a:p>
         </p:txBody>
@@ -5658,7 +5682,7 @@
               </a:defRPr>
             </a:pPr>
             <a:r>
-              <a:t>Final choice balances ranking quality and high-class detection.</a:t>
+              <a:t>Final choice balances ranking quality and purchase-class detection.</a:t>
             </a:r>
           </a:p>
         </p:txBody>
